--- a/src/Documento_Final/Rev1__Tesis_Sistemas_Uniandes_2/Presentacion_Avances_HFL_v7.pptx
+++ b/src/Documento_Final/Rev1__Tesis_Sistemas_Uniandes_2/Presentacion_Avances_HFL_v7.pptx
@@ -4590,7 +4590,7 @@
         <p:spPr>
           <a:xfrm>
             <a:off x="6492240" y="2011680"/>
-            <a:ext cx="4937760" cy="1828800"/>
+            <a:ext cx="5074920" cy="2862322"/>
           </a:xfrm>
           <a:prstGeom prst="rect">
             <a:avLst/>
